--- a/CineClip_Presentacion_TFG.pptx
+++ b/CineClip_Presentacion_TFG.pptx
@@ -5153,10 +5153,10 @@
       </p:sp>
       <p:pic>
         <p:nvPicPr>
-          <p:cNvPr id="22" name="Imagen 21">
+          <p:cNvPr id="20" name="Imagen 19">
             <a:extLst>
               <a:ext uri="{FF2B5EF4-FFF2-40B4-BE49-F238E27FC236}">
-                <a16:creationId xmlns:a16="http://schemas.microsoft.com/office/drawing/2014/main" id="{C3EADD94-807C-4842-9208-0E5B2CFC0C20}"/>
+                <a16:creationId xmlns:a16="http://schemas.microsoft.com/office/drawing/2014/main" id="{86167FE3-DA36-49D0-BA8E-858567B3F160}"/>
               </a:ext>
             </a:extLst>
           </p:cNvPr>
@@ -5173,8 +5173,8 @@
         </p:blipFill>
         <p:spPr>
           <a:xfrm>
-            <a:off x="5960508" y="1028297"/>
-            <a:ext cx="2269092" cy="2310455"/>
+            <a:off x="6204767" y="1298448"/>
+            <a:ext cx="2014353" cy="2019558"/>
           </a:xfrm>
           <a:prstGeom prst="rect">
             <a:avLst/>

--- a/CineClip_Presentacion_TFG.pptx
+++ b/CineClip_Presentacion_TFG.pptx
@@ -5153,10 +5153,10 @@
       </p:sp>
       <p:pic>
         <p:nvPicPr>
-          <p:cNvPr id="20" name="Imagen 19">
+          <p:cNvPr id="21" name="Imagen 20">
             <a:extLst>
               <a:ext uri="{FF2B5EF4-FFF2-40B4-BE49-F238E27FC236}">
-                <a16:creationId xmlns:a16="http://schemas.microsoft.com/office/drawing/2014/main" id="{86167FE3-DA36-49D0-BA8E-858567B3F160}"/>
+                <a16:creationId xmlns:a16="http://schemas.microsoft.com/office/drawing/2014/main" id="{DA1E8A55-0DB2-40FC-8ED9-CC4025F08F4D}"/>
               </a:ext>
             </a:extLst>
           </p:cNvPr>
@@ -5173,8 +5173,8 @@
         </p:blipFill>
         <p:spPr>
           <a:xfrm>
-            <a:off x="6204767" y="1298448"/>
-            <a:ext cx="2014353" cy="2019558"/>
+            <a:off x="6049750" y="1365853"/>
+            <a:ext cx="1845099" cy="1840294"/>
           </a:xfrm>
           <a:prstGeom prst="rect">
             <a:avLst/>

--- a/CineClip_Presentacion_TFG.pptx
+++ b/CineClip_Presentacion_TFG.pptx
@@ -2515,7 +2515,7 @@
                 <a:ea typeface="Calibri" pitchFamily="34" charset="-122"/>
                 <a:cs typeface="Calibri" pitchFamily="34" charset="-120"/>
               </a:rPr>
-              <a:t>Expo SDK 52</a:t>
+              <a:t>Expo SDK 54</a:t>
             </a:r>
             <a:endParaRPr lang="en-US" sz="1000" dirty="0"/>
           </a:p>
@@ -5888,7 +5888,7 @@
                 <a:ea typeface="Calibri" pitchFamily="34" charset="-122"/>
                 <a:cs typeface="Calibri" pitchFamily="34" charset="-120"/>
               </a:rPr>
-              <a:t>React Native + Expo SDK 52</a:t>
+              <a:t>React Native + Expo SDK 54</a:t>
             </a:r>
             <a:endParaRPr lang="en-US" sz="1300" dirty="0"/>
           </a:p>
@@ -6400,7 +6400,7 @@
                 <a:ea typeface="Calibri" pitchFamily="34" charset="-122"/>
                 <a:cs typeface="Calibri" pitchFamily="34" charset="-120"/>
               </a:rPr>
-              <a:t>Expo Router v3</a:t>
+              <a:t>Navegación manual (App.tsx)</a:t>
             </a:r>
             <a:endParaRPr lang="en-US" sz="1300" dirty="0"/>
           </a:p>
@@ -6439,7 +6439,7 @@
                 <a:ea typeface="Calibri" pitchFamily="34" charset="-122"/>
                 <a:cs typeface="Calibri" pitchFamily="34" charset="-120"/>
               </a:rPr>
-              <a:t>Navegación basada en ficheros</a:t>
+              <a:t>Gestión de pantallas mediante estado React (useState)</a:t>
             </a:r>
             <a:endParaRPr lang="en-US" sz="1100" dirty="0"/>
           </a:p>

--- a/CineClip_Presentacion_TFG.pptx
+++ b/CineClip_Presentacion_TFG.pptx
@@ -7060,6 +7060,13 @@
             <a:prstDash val="solid"/>
           </a:ln>
         </p:spPr>
+        <p:txBody>
+          <a:bodyPr/>
+          <a:lstStyle/>
+          <a:p>
+            <a:endParaRPr lang="es-ES" dirty="0"/>
+          </a:p>
+        </p:txBody>
       </p:sp>
       <p:sp>
         <p:nvSpPr>
@@ -7158,7 +7165,40 @@
                 <a:ea typeface="Calibri" pitchFamily="34" charset="-122"/>
                 <a:cs typeface="Calibri" pitchFamily="34" charset="-120"/>
               </a:rPr>
-              <a:t>TmdbMovieRepository · FirebaseRankingRepository</a:t>
+              <a:t>TmdbMovieRepository · </a:t>
+            </a:r>
+            <a:r>
+              <a:rPr lang="en-US" sz="1200" dirty="0" err="1">
+                <a:solidFill>
+                  <a:srgbClr val="AAAAAA"/>
+                </a:solidFill>
+                <a:latin typeface="Calibri" pitchFamily="34" charset="0"/>
+                <a:ea typeface="Calibri" pitchFamily="34" charset="-122"/>
+                <a:cs typeface="Calibri" pitchFamily="34" charset="-120"/>
+              </a:rPr>
+              <a:t>FirebaseRankingRepository</a:t>
+            </a:r>
+            <a:r>
+              <a:rPr lang="en-US" sz="1200" dirty="0">
+                <a:solidFill>
+                  <a:srgbClr val="AAAAAA"/>
+                </a:solidFill>
+                <a:latin typeface="Calibri" pitchFamily="34" charset="0"/>
+                <a:ea typeface="Calibri" pitchFamily="34" charset="-122"/>
+                <a:cs typeface="Calibri" pitchFamily="34" charset="-120"/>
+              </a:rPr>
+              <a:t> . </a:t>
+            </a:r>
+            <a:r>
+              <a:rPr lang="en-US" sz="1200" dirty="0" err="1">
+                <a:solidFill>
+                  <a:srgbClr val="AAAAAA"/>
+                </a:solidFill>
+                <a:latin typeface="Calibri" pitchFamily="34" charset="0"/>
+                <a:ea typeface="Calibri" pitchFamily="34" charset="-122"/>
+                <a:cs typeface="Calibri" pitchFamily="34" charset="-120"/>
+              </a:rPr>
+              <a:t>FirebaseAuthRepository</a:t>
             </a:r>
             <a:endParaRPr lang="en-US" sz="1200" dirty="0"/>
           </a:p>

--- a/CineClip_Presentacion_TFG.pptx
+++ b/CineClip_Presentacion_TFG.pptx
@@ -2383,7 +2383,29 @@
                 <a:ea typeface="Calibri" pitchFamily="34" charset="-122"/>
                 <a:cs typeface="Calibri" pitchFamily="34" charset="-120"/>
               </a:rPr>
-              <a:t>Curso 2025 – 2026  ·  Junio 2026</a:t>
+              <a:t>Curso 2025 – 2026  </a:t>
+            </a:r>
+            <a:r>
+              <a:rPr lang="en-US" sz="1300">
+                <a:solidFill>
+                  <a:srgbClr val="AAAAAA"/>
+                </a:solidFill>
+                <a:latin typeface="Calibri" pitchFamily="34" charset="0"/>
+                <a:ea typeface="Calibri" pitchFamily="34" charset="-122"/>
+                <a:cs typeface="Calibri" pitchFamily="34" charset="-120"/>
+              </a:rPr>
+              <a:t>·  Mayo </a:t>
+            </a:r>
+            <a:r>
+              <a:rPr lang="en-US" sz="1300" dirty="0">
+                <a:solidFill>
+                  <a:srgbClr val="AAAAAA"/>
+                </a:solidFill>
+                <a:latin typeface="Calibri" pitchFamily="34" charset="0"/>
+                <a:ea typeface="Calibri" pitchFamily="34" charset="-122"/>
+                <a:cs typeface="Calibri" pitchFamily="34" charset="-120"/>
+              </a:rPr>
+              <a:t>2026</a:t>
             </a:r>
             <a:endParaRPr lang="en-US" sz="1400" dirty="0"/>
           </a:p>
@@ -5153,10 +5175,10 @@
       </p:sp>
       <p:pic>
         <p:nvPicPr>
-          <p:cNvPr id="21" name="Imagen 20">
+          <p:cNvPr id="20" name="Imagen 19">
             <a:extLst>
               <a:ext uri="{FF2B5EF4-FFF2-40B4-BE49-F238E27FC236}">
-                <a16:creationId xmlns:a16="http://schemas.microsoft.com/office/drawing/2014/main" id="{DA1E8A55-0DB2-40FC-8ED9-CC4025F08F4D}"/>
+                <a16:creationId xmlns:a16="http://schemas.microsoft.com/office/drawing/2014/main" id="{CE600448-0A6F-41CB-84DA-5FC07335F3EF}"/>
               </a:ext>
             </a:extLst>
           </p:cNvPr>
@@ -5173,8 +5195,8 @@
         </p:blipFill>
         <p:spPr>
           <a:xfrm>
-            <a:off x="6049750" y="1365853"/>
-            <a:ext cx="1845099" cy="1840294"/>
+            <a:off x="5943364" y="1503771"/>
+            <a:ext cx="2057636" cy="2424747"/>
           </a:xfrm>
           <a:prstGeom prst="rect">
             <a:avLst/>

--- a/CineClip_Presentacion_TFG.pptx
+++ b/CineClip_Presentacion_TFG.pptx
@@ -2383,7 +2383,7 @@
                 <a:ea typeface="Calibri" pitchFamily="34" charset="-122"/>
                 <a:cs typeface="Calibri" pitchFamily="34" charset="-120"/>
               </a:rPr>
-              <a:t>Curso 2025 – 2026  </a:t>
+              <a:t xml:space="preserve">Curso 2025 – 2026  </a:t>
             </a:r>
             <a:r>
               <a:rPr lang="en-US" sz="1300">
@@ -2394,7 +2394,7 @@
                 <a:ea typeface="Calibri" pitchFamily="34" charset="-122"/>
                 <a:cs typeface="Calibri" pitchFamily="34" charset="-120"/>
               </a:rPr>
-              <a:t>·  Mayo </a:t>
+              <a:t xml:space="preserve">·  Mayo </a:t>
             </a:r>
             <a:r>
               <a:rPr lang="en-US" sz="1300" dirty="0">
@@ -7187,7 +7187,7 @@
                 <a:ea typeface="Calibri" pitchFamily="34" charset="-122"/>
                 <a:cs typeface="Calibri" pitchFamily="34" charset="-120"/>
               </a:rPr>
-              <a:t>TmdbMovieRepository · </a:t>
+              <a:t xml:space="preserve">TmdbMovieRepository · </a:t>
             </a:r>
             <a:r>
               <a:rPr lang="en-US" sz="1200" dirty="0" err="1">
@@ -7209,7 +7209,7 @@
                 <a:ea typeface="Calibri" pitchFamily="34" charset="-122"/>
                 <a:cs typeface="Calibri" pitchFamily="34" charset="-120"/>
               </a:rPr>
-              <a:t> . </a:t>
+              <a:t xml:space="preserve"> . </a:t>
             </a:r>
             <a:r>
               <a:rPr lang="en-US" sz="1200" dirty="0" err="1">

--- a/CineClip_Presentacion_TFG.pptx
+++ b/CineClip_Presentacion_TFG.pptx
@@ -5127,6 +5127,7 @@
                 <a:latin typeface="Calibri" pitchFamily="34" charset="0"/>
                 <a:ea typeface="Calibri" pitchFamily="34" charset="-122"/>
                 <a:cs typeface="Calibri" pitchFamily="34" charset="-120"/>
+                <a:hlinkClick r:id="rId4"/>
               </a:rPr>
               <a:t>🌐  https://sergiognlz.github.io/TFG-SergioGonzalez/</a:t>
             </a:r>
